--- a/media/resources/EkiOrunduuOnduktar/EkiOrunduuKoshuuJoopTorchosu (1).pptx
+++ b/media/resources/EkiOrunduuOnduktar/EkiOrunduuKoshuuJoopTorchosu (1).pptx
@@ -7565,7 +7565,7 @@
                           </a:solidFill>
                           <a:latin typeface="Bahnschrift" panose="020B0502040204020203" pitchFamily="34" charset="0"/>
                         </a:rPr>
-                        <a:t>4.64</a:t>
+                        <a:t>4,64</a:t>
                       </a:r>
                     </a:p>
                   </a:txBody>
@@ -7624,7 +7624,7 @@
                           </a:solidFill>
                           <a:latin typeface="Bahnschrift" panose="020B0502040204020203" pitchFamily="34" charset="0"/>
                         </a:rPr>
-                        <a:t>9.82</a:t>
+                        <a:t>9,82</a:t>
                       </a:r>
                     </a:p>
                   </a:txBody>
@@ -7683,7 +7683,7 @@
                           </a:solidFill>
                           <a:latin typeface="Bahnschrift" panose="020B0502040204020203" pitchFamily="34" charset="0"/>
                         </a:rPr>
-                        <a:t>4.32</a:t>
+                        <a:t>4,32</a:t>
                       </a:r>
                     </a:p>
                   </a:txBody>
@@ -7742,7 +7742,7 @@
                           </a:solidFill>
                           <a:latin typeface="Bahnschrift" panose="020B0502040204020203" pitchFamily="34" charset="0"/>
                         </a:rPr>
-                        <a:t>15.97</a:t>
+                        <a:t>15,97</a:t>
                       </a:r>
                     </a:p>
                   </a:txBody>
@@ -7801,7 +7801,7 @@
                           </a:solidFill>
                           <a:latin typeface="Bahnschrift" panose="020B0502040204020203" pitchFamily="34" charset="0"/>
                         </a:rPr>
-                        <a:t>8.12</a:t>
+                        <a:t>8,12</a:t>
                       </a:r>
                     </a:p>
                   </a:txBody>
@@ -7867,7 +7867,7 @@
                           </a:solidFill>
                           <a:latin typeface="Bahnschrift" panose="020B0502040204020203" pitchFamily="34" charset="0"/>
                         </a:rPr>
-                        <a:t>15.2</a:t>
+                        <a:t>15,2</a:t>
                       </a:r>
                     </a:p>
                   </a:txBody>
@@ -7926,7 +7926,7 @@
                           </a:solidFill>
                           <a:latin typeface="Bahnschrift" panose="020B0502040204020203" pitchFamily="34" charset="0"/>
                         </a:rPr>
-                        <a:t>3.56</a:t>
+                        <a:t>3,56</a:t>
                       </a:r>
                     </a:p>
                   </a:txBody>
@@ -7985,7 +7985,7 @@
                           </a:solidFill>
                           <a:latin typeface="Bahnschrift" panose="020B0502040204020203" pitchFamily="34" charset="0"/>
                         </a:rPr>
-                        <a:t>14.21</a:t>
+                        <a:t>14,21</a:t>
                       </a:r>
                     </a:p>
                   </a:txBody>
@@ -8044,7 +8044,7 @@
                           </a:solidFill>
                           <a:latin typeface="Bahnschrift" panose="020B0502040204020203" pitchFamily="34" charset="0"/>
                         </a:rPr>
-                        <a:t>6.1</a:t>
+                        <a:t>6,1</a:t>
                       </a:r>
                     </a:p>
                   </a:txBody>
@@ -8103,7 +8103,7 @@
                           </a:solidFill>
                           <a:latin typeface="Bahnschrift" panose="020B0502040204020203" pitchFamily="34" charset="0"/>
                         </a:rPr>
-                        <a:t>5.7</a:t>
+                        <a:t>5,7</a:t>
                       </a:r>
                     </a:p>
                   </a:txBody>
@@ -8169,7 +8169,7 @@
                           </a:solidFill>
                           <a:latin typeface="Bahnschrift" panose="020B0502040204020203" pitchFamily="34" charset="0"/>
                         </a:rPr>
-                        <a:t>14.02</a:t>
+                        <a:t>14,02</a:t>
                       </a:r>
                     </a:p>
                   </a:txBody>
@@ -8228,7 +8228,7 @@
                           </a:solidFill>
                           <a:latin typeface="Bahnschrift" panose="020B0502040204020203" pitchFamily="34" charset="0"/>
                         </a:rPr>
-                        <a:t>6.73</a:t>
+                        <a:t>6,73</a:t>
                       </a:r>
                     </a:p>
                   </a:txBody>
@@ -8287,7 +8287,7 @@
                           </a:solidFill>
                           <a:latin typeface="Bahnschrift" panose="020B0502040204020203" pitchFamily="34" charset="0"/>
                         </a:rPr>
-                        <a:t>9.1</a:t>
+                        <a:t>9,1</a:t>
                       </a:r>
                     </a:p>
                   </a:txBody>
@@ -8346,7 +8346,7 @@
                           </a:solidFill>
                           <a:latin typeface="Bahnschrift" panose="020B0502040204020203" pitchFamily="34" charset="0"/>
                         </a:rPr>
-                        <a:t>13.2</a:t>
+                        <a:t>13,2</a:t>
                       </a:r>
                     </a:p>
                   </a:txBody>
@@ -8405,7 +8405,7 @@
                           </a:solidFill>
                           <a:latin typeface="Bahnschrift" panose="020B0502040204020203" pitchFamily="34" charset="0"/>
                         </a:rPr>
-                        <a:t>15.27</a:t>
+                        <a:t>15,27</a:t>
                       </a:r>
                     </a:p>
                   </a:txBody>
@@ -8471,7 +8471,7 @@
                           </a:solidFill>
                           <a:latin typeface="Bahnschrift" panose="020B0502040204020203" pitchFamily="34" charset="0"/>
                         </a:rPr>
-                        <a:t>6.16</a:t>
+                        <a:t>6,16</a:t>
                       </a:r>
                     </a:p>
                   </a:txBody>
@@ -8530,7 +8530,7 @@
                           </a:solidFill>
                           <a:latin typeface="Bahnschrift" panose="020B0502040204020203" pitchFamily="34" charset="0"/>
                         </a:rPr>
-                        <a:t>11.81</a:t>
+                        <a:t>11,81</a:t>
                       </a:r>
                     </a:p>
                   </a:txBody>
@@ -8589,7 +8589,7 @@
                           </a:solidFill>
                           <a:latin typeface="Bahnschrift" panose="020B0502040204020203" pitchFamily="34" charset="0"/>
                         </a:rPr>
-                        <a:t>6.51</a:t>
+                        <a:t>6,51</a:t>
                       </a:r>
                     </a:p>
                   </a:txBody>
@@ -8648,7 +8648,7 @@
                           </a:solidFill>
                           <a:latin typeface="Bahnschrift" panose="020B0502040204020203" pitchFamily="34" charset="0"/>
                         </a:rPr>
-                        <a:t>4.8</a:t>
+                        <a:t>4,8</a:t>
                       </a:r>
                     </a:p>
                   </a:txBody>
@@ -8707,7 +8707,7 @@
                           </a:solidFill>
                           <a:latin typeface="Bahnschrift" panose="020B0502040204020203" pitchFamily="34" charset="0"/>
                         </a:rPr>
-                        <a:t>6.2</a:t>
+                        <a:t>6,2</a:t>
                       </a:r>
                     </a:p>
                   </a:txBody>
@@ -8773,7 +8773,7 @@
                           </a:solidFill>
                           <a:latin typeface="Bahnschrift" panose="020B0502040204020203" pitchFamily="34" charset="0"/>
                         </a:rPr>
-                        <a:t>5.85</a:t>
+                        <a:t>5,85</a:t>
                       </a:r>
                     </a:p>
                   </a:txBody>
@@ -8832,7 +8832,7 @@
                           </a:solidFill>
                           <a:latin typeface="Bahnschrift" panose="020B0502040204020203" pitchFamily="34" charset="0"/>
                         </a:rPr>
-                        <a:t>3.5</a:t>
+                        <a:t>3,5</a:t>
                       </a:r>
                     </a:p>
                   </a:txBody>
@@ -8891,7 +8891,7 @@
                           </a:solidFill>
                           <a:latin typeface="Bahnschrift" panose="020B0502040204020203" pitchFamily="34" charset="0"/>
                         </a:rPr>
-                        <a:t>7.78</a:t>
+                        <a:t>7,78</a:t>
                       </a:r>
                     </a:p>
                   </a:txBody>
@@ -8950,7 +8950,7 @@
                           </a:solidFill>
                           <a:latin typeface="Bahnschrift" panose="020B0502040204020203" pitchFamily="34" charset="0"/>
                         </a:rPr>
-                        <a:t>12.19</a:t>
+                        <a:t>12,19</a:t>
                       </a:r>
                     </a:p>
                   </a:txBody>
@@ -9009,7 +9009,7 @@
                           </a:solidFill>
                           <a:latin typeface="Bahnschrift" panose="020B0502040204020203" pitchFamily="34" charset="0"/>
                         </a:rPr>
-                        <a:t>10.81</a:t>
+                        <a:t>10,81</a:t>
                       </a:r>
                     </a:p>
                   </a:txBody>
@@ -9146,7 +9146,7 @@
                           </a:solidFill>
                           <a:latin typeface="Bahnschrift" panose="020B0502040204020203" pitchFamily="34" charset="0"/>
                         </a:rPr>
-                        <a:t>2.4 + 3.7</a:t>
+                        <a:t>2,4 + 3,7</a:t>
                       </a:r>
                     </a:p>
                   </a:txBody>
@@ -9213,7 +9213,7 @@
                           </a:solidFill>
                           <a:latin typeface="Bahnschrift" panose="020B0502040204020203" pitchFamily="34" charset="0"/>
                         </a:rPr>
-                        <a:t>0.7 + 5.81</a:t>
+                        <a:t>0,7 + 5,81</a:t>
                       </a:r>
                     </a:p>
                   </a:txBody>
@@ -9280,7 +9280,7 @@
                           </a:solidFill>
                           <a:latin typeface="Bahnschrift" panose="020B0502040204020203" pitchFamily="34" charset="0"/>
                         </a:rPr>
-                        <a:t>5.2 + 4.62</a:t>
+                        <a:t>5,2 + 4,62</a:t>
                       </a:r>
                     </a:p>
                   </a:txBody>
@@ -9347,7 +9347,7 @@
                           </a:solidFill>
                           <a:latin typeface="Bahnschrift" panose="020B0502040204020203" pitchFamily="34" charset="0"/>
                         </a:rPr>
-                        <a:t>3.48 + 2.37</a:t>
+                        <a:t>3,48 + 2,37</a:t>
                       </a:r>
                     </a:p>
                   </a:txBody>
@@ -9414,7 +9414,7 @@
                           </a:solidFill>
                           <a:latin typeface="Bahnschrift" panose="020B0502040204020203" pitchFamily="34" charset="0"/>
                         </a:rPr>
-                        <a:t>8.21 + 7.06</a:t>
+                        <a:t>8,21 + 7,06</a:t>
                       </a:r>
                     </a:p>
                   </a:txBody>
@@ -9488,7 +9488,7 @@
                           </a:solidFill>
                           <a:latin typeface="Bahnschrift" panose="020B0502040204020203" pitchFamily="34" charset="0"/>
                         </a:rPr>
-                        <a:t>4.90 + 10.3</a:t>
+                        <a:t>4,90 + 10,3</a:t>
                       </a:r>
                     </a:p>
                   </a:txBody>
@@ -9555,7 +9555,7 @@
                           </a:solidFill>
                           <a:latin typeface="Bahnschrift" panose="020B0502040204020203" pitchFamily="34" charset="0"/>
                         </a:rPr>
-                        <a:t>1.11 + 5.62</a:t>
+                        <a:t>1,11 + 5,62</a:t>
                       </a:r>
                     </a:p>
                   </a:txBody>
@@ -9622,7 +9622,7 @@
                           </a:solidFill>
                           <a:latin typeface="Bahnschrift" panose="020B0502040204020203" pitchFamily="34" charset="0"/>
                         </a:rPr>
-                        <a:t>8.07 + 0.05</a:t>
+                        <a:t>8,07 + 0,05</a:t>
                       </a:r>
                     </a:p>
                   </a:txBody>
@@ -9689,7 +9689,7 @@
                           </a:solidFill>
                           <a:latin typeface="Bahnschrift" panose="020B0502040204020203" pitchFamily="34" charset="0"/>
                         </a:rPr>
-                        <a:t>4.99 + 7.2</a:t>
+                        <a:t>4,99 + 7,2</a:t>
                       </a:r>
                     </a:p>
                   </a:txBody>
@@ -9756,7 +9756,7 @@
                           </a:solidFill>
                           <a:latin typeface="Bahnschrift" panose="020B0502040204020203" pitchFamily="34" charset="0"/>
                         </a:rPr>
-                        <a:t>5.8 + 3.3</a:t>
+                        <a:t>5,8 + 3,3</a:t>
                       </a:r>
                     </a:p>
                   </a:txBody>
@@ -9830,7 +9830,7 @@
                           </a:solidFill>
                           <a:latin typeface="Bahnschrift" panose="020B0502040204020203" pitchFamily="34" charset="0"/>
                         </a:rPr>
-                        <a:t>6.07 + 0.09</a:t>
+                        <a:t>6,07 + 0,09</a:t>
                       </a:r>
                     </a:p>
                   </a:txBody>
@@ -9897,7 +9897,7 @@
                           </a:solidFill>
                           <a:latin typeface="Bahnschrift" panose="020B0502040204020203" pitchFamily="34" charset="0"/>
                         </a:rPr>
-                        <a:t>7.9 + 6.31</a:t>
+                        <a:t>7,9 + 6,31</a:t>
                       </a:r>
                     </a:p>
                   </a:txBody>
@@ -9964,7 +9964,7 @@
                           </a:solidFill>
                           <a:latin typeface="Bahnschrift" panose="020B0502040204020203" pitchFamily="34" charset="0"/>
                         </a:rPr>
-                        <a:t>6.67 + 4.14</a:t>
+                        <a:t>6,67 + 4,14</a:t>
                       </a:r>
                     </a:p>
                   </a:txBody>
@@ -10031,7 +10031,7 @@
                           </a:solidFill>
                           <a:latin typeface="Bahnschrift" panose="020B0502040204020203" pitchFamily="34" charset="0"/>
                         </a:rPr>
-                        <a:t>1.9 + 4.3</a:t>
+                        <a:t>1,9 + 4,3</a:t>
                       </a:r>
                     </a:p>
                   </a:txBody>
@@ -10098,7 +10098,7 @@
                           </a:solidFill>
                           <a:latin typeface="Bahnschrift" panose="020B0502040204020203" pitchFamily="34" charset="0"/>
                         </a:rPr>
-                        <a:t>0.58 + 4.06</a:t>
+                        <a:t>0,58 + 4,06</a:t>
                       </a:r>
                     </a:p>
                   </a:txBody>
@@ -10172,7 +10172,7 @@
                           </a:solidFill>
                           <a:latin typeface="Bahnschrift" panose="020B0502040204020203" pitchFamily="34" charset="0"/>
                         </a:rPr>
-                        <a:t>7.32 + 4.49</a:t>
+                        <a:t>7,32 + 4,49</a:t>
                       </a:r>
                     </a:p>
                   </a:txBody>
@@ -10239,7 +10239,7 @@
                           </a:solidFill>
                           <a:latin typeface="Bahnschrift" panose="020B0502040204020203" pitchFamily="34" charset="0"/>
                         </a:rPr>
-                        <a:t>2.1 + 3.6</a:t>
+                        <a:t>2,1 + 3,6</a:t>
                       </a:r>
                     </a:p>
                   </a:txBody>
@@ -10306,7 +10306,7 @@
                           </a:solidFill>
                           <a:latin typeface="Bahnschrift" panose="020B0502040204020203" pitchFamily="34" charset="0"/>
                         </a:rPr>
-                        <a:t>13.07 + 0.95</a:t>
+                        <a:t>13,07 + 0,95</a:t>
                       </a:r>
                     </a:p>
                   </a:txBody>
@@ -10373,7 +10373,7 @@
                           </a:solidFill>
                           <a:latin typeface="Bahnschrift" panose="020B0502040204020203" pitchFamily="34" charset="0"/>
                         </a:rPr>
-                        <a:t>0.73 + 4.07</a:t>
+                        <a:t>0,73 + 4,07</a:t>
                       </a:r>
                     </a:p>
                   </a:txBody>
@@ -10440,7 +10440,7 @@
                           </a:solidFill>
                           <a:latin typeface="Bahnschrift" panose="020B0502040204020203" pitchFamily="34" charset="0"/>
                         </a:rPr>
-                        <a:t>12.4 + 3.57</a:t>
+                        <a:t>12,4 + 3,57</a:t>
                       </a:r>
                     </a:p>
                   </a:txBody>
@@ -10890,7 +10890,7 @@
                           </a:solidFill>
                           <a:latin typeface="Bahnschrift" panose="020B0502040204020203" pitchFamily="34" charset="0"/>
                         </a:rPr>
-                        <a:t>4.64</a:t>
+                        <a:t>4,64</a:t>
                       </a:r>
                     </a:p>
                   </a:txBody>
@@ -10949,7 +10949,7 @@
                           </a:solidFill>
                           <a:latin typeface="Bahnschrift" panose="020B0502040204020203" pitchFamily="34" charset="0"/>
                         </a:rPr>
-                        <a:t>9.82</a:t>
+                        <a:t>9,82</a:t>
                       </a:r>
                     </a:p>
                   </a:txBody>
@@ -11008,7 +11008,7 @@
                           </a:solidFill>
                           <a:latin typeface="Bahnschrift" panose="020B0502040204020203" pitchFamily="34" charset="0"/>
                         </a:rPr>
-                        <a:t>4.32</a:t>
+                        <a:t>4,32</a:t>
                       </a:r>
                     </a:p>
                   </a:txBody>
@@ -11070,7 +11070,7 @@
                           </a:solidFill>
                           <a:latin typeface="Bahnschrift" panose="020B0502040204020203" pitchFamily="34" charset="0"/>
                         </a:rPr>
-                        <a:t>15.97</a:t>
+                        <a:t>15,97</a:t>
                       </a:r>
                     </a:p>
                   </a:txBody>
@@ -11129,7 +11129,7 @@
                           </a:solidFill>
                           <a:latin typeface="Bahnschrift" panose="020B0502040204020203" pitchFamily="34" charset="0"/>
                         </a:rPr>
-                        <a:t>8.12</a:t>
+                        <a:t>8,12</a:t>
                       </a:r>
                     </a:p>
                   </a:txBody>
@@ -11195,7 +11195,7 @@
                           </a:solidFill>
                           <a:latin typeface="Bahnschrift" panose="020B0502040204020203" pitchFamily="34" charset="0"/>
                         </a:rPr>
-                        <a:t>15.2</a:t>
+                        <a:t>15,2</a:t>
                       </a:r>
                     </a:p>
                   </a:txBody>
@@ -11254,7 +11254,7 @@
                           </a:solidFill>
                           <a:latin typeface="Bahnschrift" panose="020B0502040204020203" pitchFamily="34" charset="0"/>
                         </a:rPr>
-                        <a:t>3.56</a:t>
+                        <a:t>3,56</a:t>
                       </a:r>
                     </a:p>
                   </a:txBody>
@@ -11316,7 +11316,7 @@
                           </a:solidFill>
                           <a:latin typeface="Bahnschrift" panose="020B0502040204020203" pitchFamily="34" charset="0"/>
                         </a:rPr>
-                        <a:t>14.21</a:t>
+                        <a:t>14,21</a:t>
                       </a:r>
                     </a:p>
                   </a:txBody>
@@ -11375,7 +11375,7 @@
                           </a:solidFill>
                           <a:latin typeface="Bahnschrift" panose="020B0502040204020203" pitchFamily="34" charset="0"/>
                         </a:rPr>
-                        <a:t>6.1</a:t>
+                        <a:t>6,1</a:t>
                       </a:r>
                     </a:p>
                   </a:txBody>
@@ -11434,7 +11434,7 @@
                           </a:solidFill>
                           <a:latin typeface="Bahnschrift" panose="020B0502040204020203" pitchFamily="34" charset="0"/>
                         </a:rPr>
-                        <a:t>5.7</a:t>
+                        <a:t>5,7</a:t>
                       </a:r>
                     </a:p>
                   </a:txBody>
@@ -11500,7 +11500,7 @@
                           </a:solidFill>
                           <a:latin typeface="Bahnschrift" panose="020B0502040204020203" pitchFamily="34" charset="0"/>
                         </a:rPr>
-                        <a:t>14.02</a:t>
+                        <a:t>14,02</a:t>
                       </a:r>
                     </a:p>
                   </a:txBody>
@@ -11559,7 +11559,7 @@
                           </a:solidFill>
                           <a:latin typeface="Bahnschrift" panose="020B0502040204020203" pitchFamily="34" charset="0"/>
                         </a:rPr>
-                        <a:t>6.73</a:t>
+                        <a:t>6,73</a:t>
                       </a:r>
                     </a:p>
                   </a:txBody>
@@ -11618,7 +11618,7 @@
                           </a:solidFill>
                           <a:latin typeface="Bahnschrift" panose="020B0502040204020203" pitchFamily="34" charset="0"/>
                         </a:rPr>
-                        <a:t>9.1</a:t>
+                        <a:t>9,1</a:t>
                       </a:r>
                     </a:p>
                   </a:txBody>
@@ -11677,7 +11677,7 @@
                           </a:solidFill>
                           <a:latin typeface="Bahnschrift" panose="020B0502040204020203" pitchFamily="34" charset="0"/>
                         </a:rPr>
-                        <a:t>13.2</a:t>
+                        <a:t>13,2</a:t>
                       </a:r>
                     </a:p>
                   </a:txBody>
@@ -11739,7 +11739,7 @@
                           </a:solidFill>
                           <a:latin typeface="Bahnschrift" panose="020B0502040204020203" pitchFamily="34" charset="0"/>
                         </a:rPr>
-                        <a:t>15.27</a:t>
+                        <a:t>15,27</a:t>
                       </a:r>
                     </a:p>
                   </a:txBody>
@@ -11805,7 +11805,7 @@
                           </a:solidFill>
                           <a:latin typeface="Bahnschrift" panose="020B0502040204020203" pitchFamily="34" charset="0"/>
                         </a:rPr>
-                        <a:t>6.16</a:t>
+                        <a:t>6,16</a:t>
                       </a:r>
                     </a:p>
                   </a:txBody>
@@ -11864,7 +11864,7 @@
                           </a:solidFill>
                           <a:latin typeface="Bahnschrift" panose="020B0502040204020203" pitchFamily="34" charset="0"/>
                         </a:rPr>
-                        <a:t>11.81</a:t>
+                        <a:t>11,81</a:t>
                       </a:r>
                     </a:p>
                   </a:txBody>
@@ -11923,7 +11923,7 @@
                           </a:solidFill>
                           <a:latin typeface="Bahnschrift" panose="020B0502040204020203" pitchFamily="34" charset="0"/>
                         </a:rPr>
-                        <a:t>6.51</a:t>
+                        <a:t>6,51</a:t>
                       </a:r>
                     </a:p>
                   </a:txBody>
@@ -11982,7 +11982,7 @@
                           </a:solidFill>
                           <a:latin typeface="Bahnschrift" panose="020B0502040204020203" pitchFamily="34" charset="0"/>
                         </a:rPr>
-                        <a:t>4.8</a:t>
+                        <a:t>4,8</a:t>
                       </a:r>
                     </a:p>
                   </a:txBody>
@@ -12041,7 +12041,7 @@
                           </a:solidFill>
                           <a:latin typeface="Bahnschrift" panose="020B0502040204020203" pitchFamily="34" charset="0"/>
                         </a:rPr>
-                        <a:t>6.2</a:t>
+                        <a:t>6,2</a:t>
                       </a:r>
                     </a:p>
                   </a:txBody>
@@ -12107,7 +12107,7 @@
                           </a:solidFill>
                           <a:latin typeface="Bahnschrift" panose="020B0502040204020203" pitchFamily="34" charset="0"/>
                         </a:rPr>
-                        <a:t>5.85</a:t>
+                        <a:t>5,85</a:t>
                       </a:r>
                     </a:p>
                   </a:txBody>
@@ -12166,7 +12166,7 @@
                           </a:solidFill>
                           <a:latin typeface="Bahnschrift" panose="020B0502040204020203" pitchFamily="34" charset="0"/>
                         </a:rPr>
-                        <a:t>3.5</a:t>
+                        <a:t>3,5</a:t>
                       </a:r>
                     </a:p>
                   </a:txBody>
@@ -12228,7 +12228,7 @@
                           </a:solidFill>
                           <a:latin typeface="Bahnschrift" panose="020B0502040204020203" pitchFamily="34" charset="0"/>
                         </a:rPr>
-                        <a:t>7.78</a:t>
+                        <a:t>7,78</a:t>
                       </a:r>
                     </a:p>
                   </a:txBody>
@@ -12290,7 +12290,7 @@
                           </a:solidFill>
                           <a:latin typeface="Bahnschrift" panose="020B0502040204020203" pitchFamily="34" charset="0"/>
                         </a:rPr>
-                        <a:t>12.19</a:t>
+                        <a:t>12,19</a:t>
                       </a:r>
                     </a:p>
                   </a:txBody>
@@ -12349,7 +12349,7 @@
                           </a:solidFill>
                           <a:latin typeface="Bahnschrift" panose="020B0502040204020203" pitchFamily="34" charset="0"/>
                         </a:rPr>
-                        <a:t>10.81</a:t>
+                        <a:t>10,81</a:t>
                       </a:r>
                     </a:p>
                   </a:txBody>
@@ -12486,7 +12486,7 @@
                           </a:solidFill>
                           <a:latin typeface="Bahnschrift" panose="020B0502040204020203" pitchFamily="34" charset="0"/>
                         </a:rPr>
-                        <a:t>2.4 + 3.7</a:t>
+                        <a:t>2,4 + 3,7</a:t>
                       </a:r>
                     </a:p>
                   </a:txBody>
@@ -12553,7 +12553,7 @@
                           </a:solidFill>
                           <a:latin typeface="Bahnschrift" panose="020B0502040204020203" pitchFamily="34" charset="0"/>
                         </a:rPr>
-                        <a:t>0.7 + 5.81</a:t>
+                        <a:t>0,7 + 5,81</a:t>
                       </a:r>
                     </a:p>
                   </a:txBody>
@@ -12620,7 +12620,7 @@
                           </a:solidFill>
                           <a:latin typeface="Bahnschrift" panose="020B0502040204020203" pitchFamily="34" charset="0"/>
                         </a:rPr>
-                        <a:t>5.2 + 4.62</a:t>
+                        <a:t>5,2 + 4,62</a:t>
                       </a:r>
                     </a:p>
                   </a:txBody>
@@ -12687,7 +12687,7 @@
                           </a:solidFill>
                           <a:latin typeface="Bahnschrift" panose="020B0502040204020203" pitchFamily="34" charset="0"/>
                         </a:rPr>
-                        <a:t>3.48 + 2.37</a:t>
+                        <a:t>3,48 + 2,37</a:t>
                       </a:r>
                     </a:p>
                   </a:txBody>
@@ -12754,7 +12754,7 @@
                           </a:solidFill>
                           <a:latin typeface="Bahnschrift" panose="020B0502040204020203" pitchFamily="34" charset="0"/>
                         </a:rPr>
-                        <a:t>8.21 + 7.06</a:t>
+                        <a:t>8,21 + 7,06</a:t>
                       </a:r>
                     </a:p>
                   </a:txBody>
@@ -12828,7 +12828,7 @@
                           </a:solidFill>
                           <a:latin typeface="Bahnschrift" panose="020B0502040204020203" pitchFamily="34" charset="0"/>
                         </a:rPr>
-                        <a:t>4.90 + 10.3</a:t>
+                        <a:t>4,90 + 10,3</a:t>
                       </a:r>
                     </a:p>
                   </a:txBody>
@@ -12895,7 +12895,7 @@
                           </a:solidFill>
                           <a:latin typeface="Bahnschrift" panose="020B0502040204020203" pitchFamily="34" charset="0"/>
                         </a:rPr>
-                        <a:t>1.11 + 5.62</a:t>
+                        <a:t>1,11 + 5,62</a:t>
                       </a:r>
                     </a:p>
                   </a:txBody>
@@ -12962,7 +12962,7 @@
                           </a:solidFill>
                           <a:latin typeface="Bahnschrift" panose="020B0502040204020203" pitchFamily="34" charset="0"/>
                         </a:rPr>
-                        <a:t>8.07 + 0.05</a:t>
+                        <a:t>8,07 + 0,05</a:t>
                       </a:r>
                     </a:p>
                   </a:txBody>
@@ -13029,7 +13029,7 @@
                           </a:solidFill>
                           <a:latin typeface="Bahnschrift" panose="020B0502040204020203" pitchFamily="34" charset="0"/>
                         </a:rPr>
-                        <a:t>4.99 + 7.2</a:t>
+                        <a:t>4,99 + 7,2</a:t>
                       </a:r>
                     </a:p>
                   </a:txBody>
@@ -13096,7 +13096,7 @@
                           </a:solidFill>
                           <a:latin typeface="Bahnschrift" panose="020B0502040204020203" pitchFamily="34" charset="0"/>
                         </a:rPr>
-                        <a:t>5.8 + 3.3</a:t>
+                        <a:t>5,8 + 3,3</a:t>
                       </a:r>
                     </a:p>
                   </a:txBody>
@@ -13170,7 +13170,7 @@
                           </a:solidFill>
                           <a:latin typeface="Bahnschrift" panose="020B0502040204020203" pitchFamily="34" charset="0"/>
                         </a:rPr>
-                        <a:t>6.07 + 0.09</a:t>
+                        <a:t>6,07 + 0,09</a:t>
                       </a:r>
                     </a:p>
                   </a:txBody>
@@ -13237,7 +13237,7 @@
                           </a:solidFill>
                           <a:latin typeface="Bahnschrift" panose="020B0502040204020203" pitchFamily="34" charset="0"/>
                         </a:rPr>
-                        <a:t>7.9 + 6.31</a:t>
+                        <a:t>7,9 + 6,31</a:t>
                       </a:r>
                     </a:p>
                   </a:txBody>
@@ -13304,7 +13304,7 @@
                           </a:solidFill>
                           <a:latin typeface="Bahnschrift" panose="020B0502040204020203" pitchFamily="34" charset="0"/>
                         </a:rPr>
-                        <a:t>6.67 + 4.14</a:t>
+                        <a:t>6,67 + 4,14</a:t>
                       </a:r>
                     </a:p>
                   </a:txBody>
@@ -13371,7 +13371,7 @@
                           </a:solidFill>
                           <a:latin typeface="Bahnschrift" panose="020B0502040204020203" pitchFamily="34" charset="0"/>
                         </a:rPr>
-                        <a:t>1.9 + 4.3</a:t>
+                        <a:t>1,9 + 4,3</a:t>
                       </a:r>
                     </a:p>
                   </a:txBody>
@@ -13438,7 +13438,7 @@
                           </a:solidFill>
                           <a:latin typeface="Bahnschrift" panose="020B0502040204020203" pitchFamily="34" charset="0"/>
                         </a:rPr>
-                        <a:t>0.58 + 4.06</a:t>
+                        <a:t>0,58 + 4,06</a:t>
                       </a:r>
                     </a:p>
                   </a:txBody>
@@ -13512,7 +13512,7 @@
                           </a:solidFill>
                           <a:latin typeface="Bahnschrift" panose="020B0502040204020203" pitchFamily="34" charset="0"/>
                         </a:rPr>
-                        <a:t>7.32 + 4.49</a:t>
+                        <a:t>7,32 + 4,49</a:t>
                       </a:r>
                     </a:p>
                   </a:txBody>
@@ -13579,7 +13579,7 @@
                           </a:solidFill>
                           <a:latin typeface="Bahnschrift" panose="020B0502040204020203" pitchFamily="34" charset="0"/>
                         </a:rPr>
-                        <a:t>2.1 + 3.6</a:t>
+                        <a:t>2,1 + 3,6</a:t>
                       </a:r>
                     </a:p>
                   </a:txBody>
@@ -13646,7 +13646,7 @@
                           </a:solidFill>
                           <a:latin typeface="Bahnschrift" panose="020B0502040204020203" pitchFamily="34" charset="0"/>
                         </a:rPr>
-                        <a:t>13.07 + 0.95</a:t>
+                        <a:t>13,07 + 0,95</a:t>
                       </a:r>
                     </a:p>
                   </a:txBody>
@@ -13713,7 +13713,7 @@
                           </a:solidFill>
                           <a:latin typeface="Bahnschrift" panose="020B0502040204020203" pitchFamily="34" charset="0"/>
                         </a:rPr>
-                        <a:t>0.73 + 4.07</a:t>
+                        <a:t>0,73 + 4,07</a:t>
                       </a:r>
                     </a:p>
                   </a:txBody>
@@ -13780,7 +13780,7 @@
                           </a:solidFill>
                           <a:latin typeface="Bahnschrift" panose="020B0502040204020203" pitchFamily="34" charset="0"/>
                         </a:rPr>
-                        <a:t>12.4 + 3.57</a:t>
+                        <a:t>12,4 + 3,57</a:t>
                       </a:r>
                     </a:p>
                   </a:txBody>
@@ -13890,7 +13890,7 @@
                             <a:sysClr val="windowText" lastClr="000000"/>
                           </a:solidFill>
                         </a:rPr>
-                        <a:t>32.36</a:t>
+                        <a:t>32,36</a:t>
                       </a:r>
                     </a:p>
                   </a:txBody>
@@ -14511,7 +14511,7 @@
             </a:pPr>
             <a:r>
               <a:rPr lang="ru-RU" sz="2400" dirty="0"/>
-              <a:t>Турдуу пикирлер учун ыраазычылык билдиребиз.</a:t>
+              <a:t>Турдуу пикирлер үчүн ыраазычылык билдиребиз.</a:t>
             </a:r>
           </a:p>
           <a:p>
